--- a/pptx/midterm/REMUS_Prototype_Slide_10.pptx
+++ b/pptx/midterm/REMUS_Prototype_Slide_10.pptx
@@ -775,7 +775,7 @@
 </file>
 
 <file path=ppt/slides/slide1.xml><?xml version="1.0" encoding="utf-8"?>
-<p:sld xmlns:a="http://schemas.openxmlformats.org/drawingml/2006/main" xmlns:p="http://schemas.openxmlformats.org/presentationml/2006/main">
+<p:sld xmlns:r="http://schemas.openxmlformats.org/officeDocument/2006/relationships" xmlns:a="http://schemas.openxmlformats.org/drawingml/2006/main" xmlns:p="http://schemas.openxmlformats.org/presentationml/2006/main">
   <p:cSld>
     <p:bg>
       <p:bgPr>
@@ -823,7 +823,7 @@
                 <a:latin typeface="Arial"/>
                 <a:ea typeface="Arial"/>
               </a:rPr>
-              <a:t>Dual-FPGA Prototype and Evaluation</a:t>
+              <a:t>10. Dual-FPGA Prototype and Evaluation</a:t>
             </a:r>
           </a:p>
         </p:txBody>

--- a/pptx/midterm/REMUS_Prototype_Slide_10.pptx
+++ b/pptx/midterm/REMUS_Prototype_Slide_10.pptx
@@ -5,10 +5,10 @@
     <p:sldMasterId xmlns:r="http://schemas.openxmlformats.org/officeDocument/2006/relationships" id="2147483648" r:id="rId1"/>
   </p:sldMasterIdLst>
   <p:notesMasterIdLst>
-    <p:notesMasterId r:id="R6476f04f5ce84e14"/>
+    <p:notesMasterId r:id="R9c45bd68214a4b10"/>
   </p:notesMasterIdLst>
   <p:sldIdLst>
-    <p:sldId id="256" r:id="R718b789ca57149b5"/>
+    <p:sldId id="256" r:id="R0d779bddd4de4144"/>
   </p:sldIdLst>
   <p:sldSz cx="12192000" cy="6858000" type="screen16x9"/>
   <p:notesSz cx="6858000" cy="9144000"/>
@@ -775,8 +775,8 @@
 </file>
 
 <file path=ppt/slides/slide1.xml><?xml version="1.0" encoding="utf-8"?>
-<p:sld xmlns:r="http://schemas.openxmlformats.org/officeDocument/2006/relationships" xmlns:a="http://schemas.openxmlformats.org/drawingml/2006/main" xmlns:p="http://schemas.openxmlformats.org/presentationml/2006/main">
-  <p:cSld>
+<p:sld xmlns:a="http://schemas.openxmlformats.org/drawingml/2006/main" xmlns:r="http://schemas.openxmlformats.org/officeDocument/2006/relationships" xmlns:p="http://schemas.openxmlformats.org/presentationml/2006/main">
+  <p:cSld xmlns:a="http://schemas.openxmlformats.org/drawingml/2006/main" xmlns:p="http://schemas.openxmlformats.org/presentationml/2006/main" xmlns:r="http://schemas.openxmlformats.org/officeDocument/2006/relationships">
     <p:bg>
       <p:bgPr>
         <a:solidFill xmlns:a="http://schemas.openxmlformats.org/drawingml/2006/main">
@@ -814,16 +814,35 @@
             <a:noAutofit/>
           </a:bodyPr>
           <a:lstStyle xmlns:a="http://schemas.openxmlformats.org/drawingml/2006/main"/>
-          <a:p xmlns:a="http://schemas.openxmlformats.org/drawingml/2006/main">
+          <a:p>
+            <a:pPr algn="l">
+              <a:lnSpc>
+                <a:spcPct val="90000"/>
+              </a:lnSpc>
+              <a:defRPr sz="1800" b="1">
+                <a:solidFill>
+                  <a:srgbClr val="183B56"/>
+                </a:solidFill>
+                <a:latin typeface="Arial"/>
+                <a:ea typeface="Arial"/>
+              </a:defRPr>
+            </a:pPr>
+            <a:r>
+              <a:rPr lang="en-US" sz="3200" b="1">
+                <a:solidFill>
+                  <a:srgbClr val="183B56"/>
+                </a:solidFill>
+              </a:rPr>
+              <a:t xml:space="preserve">Evaluation: </a:t>
+            </a:r>
             <a:r>
               <a:rPr lang="en-US" sz="3000" b="1">
                 <a:solidFill>
                   <a:srgbClr val="183B56"/>
                 </a:solidFill>
                 <a:latin typeface="Arial"/>
-                <a:ea typeface="Arial"/>
-              </a:rPr>
-              <a:t>10. Dual-FPGA Prototype and Evaluation</a:t>
+              </a:rPr>
+              <a:t>Dual-FPGA Emulation System</a:t>
             </a:r>
           </a:p>
         </p:txBody>
@@ -950,7 +969,7 @@
           <p:nvPr/>
         </p:nvPicPr>
         <p:blipFill>
-          <a:blip xmlns:r="http://schemas.openxmlformats.org/officeDocument/2006/relationships" r:embed="R855e26c6cbf24c72"/>
+          <a:blip xmlns:r="http://schemas.openxmlformats.org/officeDocument/2006/relationships" r:embed="R7526e4c6aa2b49a1"/>
           <a:srcRect l="5473" t="35169" r="4612" b="17350"/>
           <a:stretch>
             <a:fillRect/>
@@ -968,46 +987,6 @@
       </p:pic>
       <p:sp>
         <p:nvSpPr>
-          <p:cNvPr id="100004" name="S10.Platform.PhotoLabel"/>
-          <p:cNvSpPr txBox="1"/>
-          <p:nvPr/>
-        </p:nvSpPr>
-        <p:spPr>
-          <a:xfrm>
-            <a:off x="438912" y="1609344"/>
-            <a:ext cx="2432304" cy="329184"/>
-          </a:xfrm>
-          <a:prstGeom prst="rect">
-            <a:avLst/>
-          </a:prstGeom>
-          <a:solidFill>
-            <a:srgbClr val="183B56"/>
-          </a:solidFill>
-          <a:ln>
-            <a:noFill/>
-          </a:ln>
-        </p:spPr>
-        <p:txBody>
-          <a:bodyPr lIns="38100" tIns="38100" rIns="38100" bIns="38100">
-            <a:noAutofit/>
-          </a:bodyPr>
-          <a:lstStyle/>
-          <a:p>
-            <a:r>
-              <a:rPr lang="en-US" sz="1300" b="1">
-                <a:solidFill>
-                  <a:srgbClr val="FFFFFF"/>
-                </a:solidFill>
-                <a:latin typeface="Arial"/>
-                <a:ea typeface="Arial"/>
-              </a:rPr>
-              <a:t>Two NM37 FPGA boards</a:t>
-            </a:r>
-          </a:p>
-        </p:txBody>
-      </p:sp>
-      <p:sp>
-        <p:nvSpPr>
           <p:cNvPr id="100005" name="S10.Platform.Text1"/>
           <p:cNvSpPr txBox="1"/>
           <p:nvPr/>
@@ -1031,13 +1010,23 @@
           </a:bodyPr>
           <a:lstStyle/>
           <a:p>
-            <a:r>
-              <a:rPr lang="en-US" sz="1700">
+            <a:pPr marL="285750" indent="-285750" algn="l">
+              <a:buFont xmlns:a="http://schemas.openxmlformats.org/drawingml/2006/main" typeface="Arial" panose="020B0604020202020204" pitchFamily="34" charset="0"/>
+              <a:buChar xmlns:a="http://schemas.openxmlformats.org/drawingml/2006/main" char="•"/>
+              <a:defRPr sz="1700" b="0">
                 <a:solidFill>
                   <a:srgbClr val="20354A"/>
                 </a:solidFill>
                 <a:latin typeface="Arial"/>
                 <a:ea typeface="Arial"/>
+              </a:defRPr>
+            </a:pPr>
+            <a:r>
+              <a:rPr sz="1700">
+                <a:solidFill>
+                  <a:srgbClr val="20354A"/>
+                </a:solidFill>
+                <a:latin typeface="Arial"/>
               </a:rPr>
               <a:t>Two NM37 boards with VU37P FPGAs</a:t>
             </a:r>
@@ -1069,13 +1058,23 @@
           </a:bodyPr>
           <a:lstStyle/>
           <a:p>
-            <a:r>
-              <a:rPr lang="en-US" sz="1700">
+            <a:pPr marL="285750" indent="-285750" algn="l">
+              <a:buFont xmlns:a="http://schemas.openxmlformats.org/drawingml/2006/main" typeface="Arial" panose="020B0604020202020204" pitchFamily="34" charset="0"/>
+              <a:buChar xmlns:a="http://schemas.openxmlformats.org/drawingml/2006/main" char="•"/>
+              <a:defRPr sz="1700" b="0">
                 <a:solidFill>
                   <a:srgbClr val="20354A"/>
                 </a:solidFill>
                 <a:latin typeface="Arial"/>
                 <a:ea typeface="Arial"/>
+              </a:defRPr>
+            </a:pPr>
+            <a:r>
+              <a:rPr sz="1700">
+                <a:solidFill>
+                  <a:srgbClr val="20354A"/>
+                </a:solidFill>
+                <a:latin typeface="Arial"/>
               </a:rPr>
               <a:t>PCIe access from a shared Host</a:t>
             </a:r>
@@ -1107,13 +1106,23 @@
           </a:bodyPr>
           <a:lstStyle/>
           <a:p>
-            <a:r>
-              <a:rPr lang="en-US" sz="1700">
+            <a:pPr marL="285750" indent="-285750" algn="l">
+              <a:buFont xmlns:a="http://schemas.openxmlformats.org/drawingml/2006/main" typeface="Arial" panose="020B0604020202020204" pitchFamily="34" charset="0"/>
+              <a:buChar xmlns:a="http://schemas.openxmlformats.org/drawingml/2006/main" char="•"/>
+              <a:defRPr sz="1700" b="0">
                 <a:solidFill>
                   <a:srgbClr val="20354A"/>
                 </a:solidFill>
                 <a:latin typeface="Arial"/>
                 <a:ea typeface="Arial"/>
+              </a:defRPr>
+            </a:pPr>
+            <a:r>
+              <a:rPr sz="1700">
+                <a:solidFill>
+                  <a:srgbClr val="20354A"/>
+                </a:solidFill>
+                <a:latin typeface="Arial"/>
               </a:rPr>
               <a:t>QSFP/Aurora links between FPGAs</a:t>
             </a:r>
@@ -1468,7 +1477,7 @@
           <p:nvPr/>
         </p:nvPicPr>
         <p:blipFill>
-          <a:blip xmlns:r="http://schemas.openxmlformats.org/officeDocument/2006/relationships" r:embed="Rca55a36f0ba74fe1"/>
+          <a:blip xmlns:r="http://schemas.openxmlformats.org/officeDocument/2006/relationships" r:embed="Rbee2d3e9065349d4"/>
           <a:srcRect l="0" t="61168" r="0" b="2161"/>
           <a:stretch>
             <a:fillRect/>
@@ -1848,53 +1857,32 @@
           </a:bodyPr>
           <a:lstStyle/>
           <a:p>
+            <a:pPr algn="l">
+              <a:defRPr sz="2200" b="1">
+                <a:solidFill>
+                  <a:srgbClr val="DF973E"/>
+                </a:solidFill>
+                <a:latin typeface="Arial"/>
+                <a:ea typeface="Arial"/>
+              </a:defRPr>
+            </a:pPr>
             <a:r>
               <a:rPr lang="en-US" sz="2200" b="1">
                 <a:solidFill>
                   <a:srgbClr val="DF973E"/>
                 </a:solidFill>
                 <a:latin typeface="Arial"/>
-                <a:ea typeface="Arial"/>
-              </a:rPr>
-              <a:t>≈0.8–1.1 ms</a:t>
-            </a:r>
-          </a:p>
-        </p:txBody>
-      </p:sp>
-      <p:sp>
-        <p:nvSpPr>
-          <p:cNvPr id="100028" name="S10.Metrics.Scope"/>
-          <p:cNvSpPr txBox="1"/>
-          <p:nvPr/>
-        </p:nvSpPr>
-        <p:spPr>
-          <a:xfrm>
-            <a:off x="320040" y="6565392"/>
-            <a:ext cx="10881360" cy="201168"/>
-          </a:xfrm>
-          <a:prstGeom prst="rect">
-            <a:avLst/>
-          </a:prstGeom>
-          <a:noFill/>
-          <a:ln>
-            <a:noFill/>
-          </a:ln>
-        </p:spPr>
-        <p:txBody>
-          <a:bodyPr lIns="0" tIns="0" rIns="0" bIns="0">
-            <a:noAutofit/>
-          </a:bodyPr>
-          <a:lstStyle/>
-          <a:p>
-            <a:r>
-              <a:rPr lang="en-US" sz="1000">
-                <a:solidFill>
-                  <a:srgbClr val="607184"/>
-                </a:solidFill>
-                <a:latin typeface="Arial"/>
-                <a:ea typeface="Arial"/>
-              </a:rPr>
-              <a:t>Measured run windows; KMH measured before checkpoint save. Pause latency includes Host control.</a:t>
+              </a:rPr>
+              <a:t xml:space="preserve">≈0.8~1.1 </a:t>
+            </a:r>
+            <a:r>
+              <a:rPr lang="en-US" sz="2200" b="1">
+                <a:solidFill>
+                  <a:srgbClr val="DF973E"/>
+                </a:solidFill>
+                <a:latin typeface="Arial"/>
+              </a:rPr>
+              <a:t>ms</a:t>
             </a:r>
           </a:p>
         </p:txBody>

--- a/pptx/midterm/REMUS_Prototype_Slide_10.pptx
+++ b/pptx/midterm/REMUS_Prototype_Slide_10.pptx
@@ -5,10 +5,10 @@
     <p:sldMasterId xmlns:r="http://schemas.openxmlformats.org/officeDocument/2006/relationships" id="2147483648" r:id="rId1"/>
   </p:sldMasterIdLst>
   <p:notesMasterIdLst>
-    <p:notesMasterId r:id="R9c45bd68214a4b10"/>
+    <p:notesMasterId r:id="R6553585622f24fa1"/>
   </p:notesMasterIdLst>
   <p:sldIdLst>
-    <p:sldId id="256" r:id="R0d779bddd4de4144"/>
+    <p:sldId id="256" r:id="Rca3754a94f444404"/>
   </p:sldIdLst>
   <p:sldSz cx="12192000" cy="6858000" type="screen16x9"/>
   <p:notesSz cx="6858000" cy="9144000"/>
@@ -337,13 +337,13 @@
         <a:srgbClr val="E7E6E6"/>
       </a:lt2>
       <a:accent1>
-        <a:srgbClr val="183B56"/>
+        <a:srgbClr val="C00000"/>
       </a:accent1>
       <a:accent2>
-        <a:srgbClr val="008C95"/>
+        <a:srgbClr val="70AD47"/>
       </a:accent2>
       <a:accent3>
-        <a:srgbClr val="DF973E"/>
+        <a:srgbClr val="ED7D31"/>
       </a:accent3>
       <a:accent4>
         <a:srgbClr val="FFC000"/>
@@ -821,7 +821,7 @@
               </a:lnSpc>
               <a:defRPr sz="1800" b="1">
                 <a:solidFill>
-                  <a:srgbClr val="183B56"/>
+                  <a:srgbClr val="C00000"/>
                 </a:solidFill>
                 <a:latin typeface="Arial"/>
                 <a:ea typeface="Arial"/>
@@ -830,7 +830,7 @@
             <a:r>
               <a:rPr lang="en-US" sz="3200" b="1">
                 <a:solidFill>
-                  <a:srgbClr val="183B56"/>
+                  <a:srgbClr val="C00000"/>
                 </a:solidFill>
               </a:rPr>
               <a:t xml:space="preserve">Evaluation: </a:t>
@@ -838,7 +838,7 @@
             <a:r>
               <a:rPr lang="en-US" sz="3000" b="1">
                 <a:solidFill>
-                  <a:srgbClr val="183B56"/>
+                  <a:srgbClr val="C00000"/>
                 </a:solidFill>
                 <a:latin typeface="Arial"/>
               </a:rPr>
@@ -862,10 +862,12 @@
             <a:avLst/>
           </a:prstGeom>
           <a:solidFill>
-            <a:srgbClr val="008C95"/>
+            <a:srgbClr val="C55A11"/>
           </a:solidFill>
           <a:ln>
-            <a:noFill/>
+            <a:solidFill>
+              <a:srgbClr val="C55A11"/>
+            </a:solidFill>
           </a:ln>
         </p:spPr>
         <p:txBody>
@@ -876,7 +878,7 @@
           <a:p>
             <a:endParaRPr lang="en-US" sz="1800">
               <a:solidFill>
-                <a:srgbClr val="20354A"/>
+                <a:srgbClr val="C55A11"/>
               </a:solidFill>
               <a:latin typeface="Arial"/>
               <a:ea typeface="Arial"/>
@@ -912,7 +914,7 @@
             <a:r>
               <a:rPr lang="en-US" sz="2200" b="1">
                 <a:solidFill>
-                  <a:srgbClr val="183B56"/>
+                  <a:srgbClr val="333333"/>
                 </a:solidFill>
                 <a:latin typeface="Arial"/>
                 <a:ea typeface="Arial"/>
@@ -950,7 +952,7 @@
             <a:r>
               <a:rPr lang="en-US" sz="2200" b="1">
                 <a:solidFill>
-                  <a:srgbClr val="183B56"/>
+                  <a:srgbClr val="333333"/>
                 </a:solidFill>
                 <a:latin typeface="Arial"/>
                 <a:ea typeface="Arial"/>
@@ -969,7 +971,7 @@
           <p:nvPr/>
         </p:nvPicPr>
         <p:blipFill>
-          <a:blip xmlns:r="http://schemas.openxmlformats.org/officeDocument/2006/relationships" r:embed="R7526e4c6aa2b49a1"/>
+          <a:blip xmlns:r="http://schemas.openxmlformats.org/officeDocument/2006/relationships" r:embed="Re7fe2d6da92b45b8"/>
           <a:srcRect l="5473" t="35169" r="4612" b="17350"/>
           <a:stretch>
             <a:fillRect/>
@@ -1015,7 +1017,7 @@
               <a:buChar xmlns:a="http://schemas.openxmlformats.org/drawingml/2006/main" char="•"/>
               <a:defRPr sz="1700" b="0">
                 <a:solidFill>
-                  <a:srgbClr val="20354A"/>
+                  <a:srgbClr val="1F1F1F"/>
                 </a:solidFill>
                 <a:latin typeface="Arial"/>
                 <a:ea typeface="Arial"/>
@@ -1024,7 +1026,7 @@
             <a:r>
               <a:rPr sz="1700">
                 <a:solidFill>
-                  <a:srgbClr val="20354A"/>
+                  <a:srgbClr val="1F1F1F"/>
                 </a:solidFill>
                 <a:latin typeface="Arial"/>
               </a:rPr>
@@ -1063,7 +1065,7 @@
               <a:buChar xmlns:a="http://schemas.openxmlformats.org/drawingml/2006/main" char="•"/>
               <a:defRPr sz="1700" b="0">
                 <a:solidFill>
-                  <a:srgbClr val="20354A"/>
+                  <a:srgbClr val="1F1F1F"/>
                 </a:solidFill>
                 <a:latin typeface="Arial"/>
                 <a:ea typeface="Arial"/>
@@ -1072,7 +1074,7 @@
             <a:r>
               <a:rPr sz="1700">
                 <a:solidFill>
-                  <a:srgbClr val="20354A"/>
+                  <a:srgbClr val="1F1F1F"/>
                 </a:solidFill>
                 <a:latin typeface="Arial"/>
               </a:rPr>
@@ -1111,7 +1113,7 @@
               <a:buChar xmlns:a="http://schemas.openxmlformats.org/drawingml/2006/main" char="•"/>
               <a:defRPr sz="1700" b="0">
                 <a:solidFill>
-                  <a:srgbClr val="20354A"/>
+                  <a:srgbClr val="1F1F1F"/>
                 </a:solidFill>
                 <a:latin typeface="Arial"/>
                 <a:ea typeface="Arial"/>
@@ -1120,7 +1122,7 @@
             <a:r>
               <a:rPr sz="1700">
                 <a:solidFill>
-                  <a:srgbClr val="20354A"/>
+                  <a:srgbClr val="1F1F1F"/>
                 </a:solidFill>
                 <a:latin typeface="Arial"/>
               </a:rPr>
@@ -1144,7 +1146,7 @@
             <a:avLst/>
           </a:prstGeom>
           <a:solidFill>
-            <a:srgbClr val="EAF4F3"/>
+            <a:srgbClr val="F1F7EC"/>
           </a:solidFill>
           <a:ln>
             <a:noFill/>
@@ -1158,7 +1160,7 @@
           <a:p>
             <a:endParaRPr lang="en-US" sz="1800">
               <a:solidFill>
-                <a:srgbClr val="20354A"/>
+                <a:srgbClr val="1F1F1F"/>
               </a:solidFill>
               <a:latin typeface="Arial"/>
               <a:ea typeface="Arial"/>
@@ -1194,7 +1196,7 @@
             <a:r>
               <a:rPr lang="en-US" sz="1400" b="1">
                 <a:solidFill>
-                  <a:srgbClr val="008C95"/>
+                  <a:srgbClr val="70AD47"/>
                 </a:solidFill>
                 <a:latin typeface="Arial"/>
                 <a:ea typeface="Arial"/>
@@ -1232,7 +1234,7 @@
             <a:r>
               <a:rPr lang="en-US" sz="1400" b="1">
                 <a:solidFill>
-                  <a:srgbClr val="008C95"/>
+                  <a:srgbClr val="70AD47"/>
                 </a:solidFill>
                 <a:latin typeface="Arial"/>
                 <a:ea typeface="Arial"/>
@@ -1270,7 +1272,7 @@
             <a:r>
               <a:rPr lang="en-US" sz="1700" b="1">
                 <a:solidFill>
-                  <a:srgbClr val="183B56"/>
+                  <a:srgbClr val="333333"/>
                 </a:solidFill>
                 <a:latin typeface="Arial"/>
                 <a:ea typeface="Arial"/>
@@ -1308,7 +1310,7 @@
             <a:r>
               <a:rPr lang="en-US" sz="1700">
                 <a:solidFill>
-                  <a:srgbClr val="20354A"/>
+                  <a:srgbClr val="1F1F1F"/>
                 </a:solidFill>
                 <a:latin typeface="Arial"/>
                 <a:ea typeface="Arial"/>
@@ -1333,7 +1335,7 @@
             <a:avLst/>
           </a:prstGeom>
           <a:solidFill>
-            <a:srgbClr val="D8E3E9"/>
+            <a:srgbClr val="DEDEDE"/>
           </a:solidFill>
           <a:ln>
             <a:noFill/>
@@ -1347,7 +1349,7 @@
           <a:p>
             <a:endParaRPr lang="en-US" sz="1800">
               <a:solidFill>
-                <a:srgbClr val="20354A"/>
+                <a:srgbClr val="1F1F1F"/>
               </a:solidFill>
               <a:latin typeface="Arial"/>
               <a:ea typeface="Arial"/>
@@ -1383,7 +1385,7 @@
             <a:r>
               <a:rPr lang="en-US" sz="1700" b="1">
                 <a:solidFill>
-                  <a:srgbClr val="183B56"/>
+                  <a:srgbClr val="333333"/>
                 </a:solidFill>
                 <a:latin typeface="Arial"/>
                 <a:ea typeface="Arial"/>
@@ -1421,7 +1423,7 @@
             <a:r>
               <a:rPr lang="en-US" sz="1700">
                 <a:solidFill>
-                  <a:srgbClr val="20354A"/>
+                  <a:srgbClr val="1F1F1F"/>
                 </a:solidFill>
                 <a:latin typeface="Arial"/>
                 <a:ea typeface="Arial"/>
@@ -1446,7 +1448,7 @@
             <a:avLst/>
           </a:prstGeom>
           <a:solidFill>
-            <a:srgbClr val="D8E3E9"/>
+            <a:srgbClr val="DEDEDE"/>
           </a:solidFill>
           <a:ln>
             <a:noFill/>
@@ -1460,7 +1462,7 @@
           <a:p>
             <a:endParaRPr lang="en-US" sz="1800">
               <a:solidFill>
-                <a:srgbClr val="20354A"/>
+                <a:srgbClr val="1F1F1F"/>
               </a:solidFill>
               <a:latin typeface="Arial"/>
               <a:ea typeface="Arial"/>
@@ -1477,7 +1479,7 @@
           <p:nvPr/>
         </p:nvPicPr>
         <p:blipFill>
-          <a:blip xmlns:r="http://schemas.openxmlformats.org/officeDocument/2006/relationships" r:embed="Rbee2d3e9065349d4"/>
+          <a:blip xmlns:r="http://schemas.openxmlformats.org/officeDocument/2006/relationships" r:embed="Rf5e8ce08da4e48a5"/>
           <a:srcRect l="0" t="61168" r="0" b="2161"/>
           <a:stretch>
             <a:fillRect/>
@@ -1521,7 +1523,7 @@
             <a:r>
               <a:rPr lang="en-US" sz="1800">
                 <a:solidFill>
-                  <a:srgbClr val="183B56"/>
+                  <a:srgbClr val="333333"/>
                 </a:solidFill>
                 <a:latin typeface="Arial"/>
                 <a:ea typeface="Arial"/>
@@ -1546,7 +1548,7 @@
             <a:avLst/>
           </a:prstGeom>
           <a:solidFill>
-            <a:srgbClr val="EAF4F3"/>
+            <a:srgbClr val="F1F7EC"/>
           </a:solidFill>
           <a:ln>
             <a:noFill/>
@@ -1560,7 +1562,7 @@
           <a:p>
             <a:endParaRPr lang="en-US" sz="1800">
               <a:solidFill>
-                <a:srgbClr val="20354A"/>
+                <a:srgbClr val="1F1F1F"/>
               </a:solidFill>
               <a:latin typeface="Arial"/>
               <a:ea typeface="Arial"/>
@@ -1596,7 +1598,7 @@
             <a:r>
               <a:rPr lang="en-US" sz="1200">
                 <a:solidFill>
-                  <a:srgbClr val="183B56"/>
+                  <a:srgbClr val="333333"/>
                 </a:solidFill>
                 <a:latin typeface="Arial"/>
                 <a:ea typeface="Arial"/>
@@ -1634,7 +1636,7 @@
             <a:r>
               <a:rPr lang="en-US" sz="2200" b="1">
                 <a:solidFill>
-                  <a:srgbClr val="008C95"/>
+                  <a:srgbClr val="70AD47"/>
                 </a:solidFill>
                 <a:latin typeface="Arial"/>
                 <a:ea typeface="Arial"/>
@@ -1659,7 +1661,7 @@
             <a:avLst/>
           </a:prstGeom>
           <a:solidFill>
-            <a:srgbClr val="BDCBD4"/>
+            <a:srgbClr val="D1D1D1"/>
           </a:solidFill>
           <a:ln>
             <a:noFill/>
@@ -1673,7 +1675,7 @@
           <a:p>
             <a:endParaRPr lang="en-US" sz="1800">
               <a:solidFill>
-                <a:srgbClr val="20354A"/>
+                <a:srgbClr val="1F1F1F"/>
               </a:solidFill>
               <a:latin typeface="Arial"/>
               <a:ea typeface="Arial"/>
@@ -1709,7 +1711,7 @@
             <a:r>
               <a:rPr lang="en-US" sz="1200">
                 <a:solidFill>
-                  <a:srgbClr val="183B56"/>
+                  <a:srgbClr val="333333"/>
                 </a:solidFill>
                 <a:latin typeface="Arial"/>
                 <a:ea typeface="Arial"/>
@@ -1747,7 +1749,7 @@
             <a:r>
               <a:rPr lang="en-US" sz="2200" b="1">
                 <a:solidFill>
-                  <a:srgbClr val="008C95"/>
+                  <a:srgbClr val="70AD47"/>
                 </a:solidFill>
                 <a:latin typeface="Arial"/>
                 <a:ea typeface="Arial"/>
@@ -1772,7 +1774,7 @@
             <a:avLst/>
           </a:prstGeom>
           <a:solidFill>
-            <a:srgbClr val="BDCBD4"/>
+            <a:srgbClr val="D1D1D1"/>
           </a:solidFill>
           <a:ln>
             <a:noFill/>
@@ -1786,7 +1788,7 @@
           <a:p>
             <a:endParaRPr lang="en-US" sz="1800">
               <a:solidFill>
-                <a:srgbClr val="20354A"/>
+                <a:srgbClr val="1F1F1F"/>
               </a:solidFill>
               <a:latin typeface="Arial"/>
               <a:ea typeface="Arial"/>
@@ -1822,7 +1824,7 @@
             <a:r>
               <a:rPr lang="en-US" sz="1200">
                 <a:solidFill>
-                  <a:srgbClr val="183B56"/>
+                  <a:srgbClr val="333333"/>
                 </a:solidFill>
                 <a:latin typeface="Arial"/>
                 <a:ea typeface="Arial"/>
@@ -1860,7 +1862,7 @@
             <a:pPr algn="l">
               <a:defRPr sz="2200" b="1">
                 <a:solidFill>
-                  <a:srgbClr val="DF973E"/>
+                  <a:srgbClr val="ED7D31"/>
                 </a:solidFill>
                 <a:latin typeface="Arial"/>
                 <a:ea typeface="Arial"/>
@@ -1869,7 +1871,7 @@
             <a:r>
               <a:rPr lang="en-US" sz="2200" b="1">
                 <a:solidFill>
-                  <a:srgbClr val="DF973E"/>
+                  <a:srgbClr val="ED7D31"/>
                 </a:solidFill>
                 <a:latin typeface="Arial"/>
               </a:rPr>
@@ -1878,7 +1880,7 @@
             <a:r>
               <a:rPr lang="en-US" sz="2200" b="1">
                 <a:solidFill>
-                  <a:srgbClr val="DF973E"/>
+                  <a:srgbClr val="ED7D31"/>
                 </a:solidFill>
                 <a:latin typeface="Arial"/>
               </a:rPr>
@@ -1916,7 +1918,7 @@
             <a:r>
               <a:rPr lang="en-US" sz="1000">
                 <a:solidFill>
-                  <a:srgbClr val="607184"/>
+                  <a:srgbClr val="898989"/>
                 </a:solidFill>
                 <a:latin typeface="Arial"/>
                 <a:ea typeface="Arial"/>
@@ -1948,13 +1950,13 @@
         <a:srgbClr val="E7E6E6"/>
       </a:lt2>
       <a:accent1>
-        <a:srgbClr val="183B56"/>
+        <a:srgbClr val="C00000"/>
       </a:accent1>
       <a:accent2>
-        <a:srgbClr val="008C95"/>
+        <a:srgbClr val="70AD47"/>
       </a:accent2>
       <a:accent3>
-        <a:srgbClr val="DF973E"/>
+        <a:srgbClr val="ED7D31"/>
       </a:accent3>
       <a:accent4>
         <a:srgbClr val="FFC000"/>
